--- a/public/fun/pack/pptx/newspro/카드뉴스프리미엄_27_건강·안심습관_코퍼차콜.pptx
+++ b/public/fun/pack/pptx/newspro/카드뉴스프리미엄_27_건강·안심습관_코퍼차콜.pptx
@@ -113,12 +113,12 @@
   <p:extLst>
     <p:ext uri="{521415D9-36F7-43E2-AB2F-B90AF26B5E84}">
       <p14:sectionLst xmlns:p14="http://schemas.microsoft.com/office/powerpoint/2010/main">
-        <p14:section name="시작" id="{B7D7B24F-FF6D-4293-8D0D-CAD5CC714962}">
+        <p14:section name="시작" id="{3F61605B-7F14-49CC-8502-85904AC363F6}">
           <p14:sldIdLst>
             <p14:sldId id="256"/>
           </p14:sldIdLst>
         </p14:section>
-        <p14:section name="본문" id="{0675F38B-254B-4C06-9ECC-BA7CF35264B6}">
+        <p14:section name="본문" id="{5378FFD0-C4F7-4421-B060-2D2001EDB145}">
           <p14:sldIdLst>
             <p14:sldId id="257"/>
             <p14:sldId id="258"/>
@@ -127,7 +127,7 @@
             <p14:sldId id="261"/>
           </p14:sldIdLst>
         </p14:section>
-        <p14:section name="마무리" id="{32EC82EE-FEBA-4828-A819-42475622F8A4}">
+        <p14:section name="마무리" id="{9332336B-DE8A-473A-A67F-1FE50BAF79BE}">
           <p14:sldIdLst>
             <p14:sldId id="262"/>
           </p14:sldIdLst>
@@ -1550,7 +1550,7 @@
             </a:lvl1pPr>
           </a:lstStyle>
           <a:p>
-            <a:fld id="{8B487553-43B1-4857-B012-6002A36A0FF9}" type="slidenum">
+            <a:fld id="{4ED3614C-4F30-446E-BC2A-3AD1898EA51B}" type="slidenum">
               <a:rPr lang="en-US"/>
               <a:t>‹#›</a:t>
             </a:fld>
@@ -2158,7 +2158,7 @@
             </a:lvl1pPr>
           </a:lstStyle>
           <a:p>
-            <a:fld id="{3DB9E836-49BC-4187-9401-8695E3218233}" type="slidenum">
+            <a:fld id="{5FCA40CC-12BB-4B73-B82B-79953D1AEBF5}" type="slidenum">
               <a:rPr lang="en-US"/>
               <a:t>‹#›</a:t>
             </a:fld>
@@ -2752,7 +2752,7 @@
             </a:lvl1pPr>
           </a:lstStyle>
           <a:p>
-            <a:fld id="{911ECA0D-4122-465A-8DE7-7D3C1E2DD4EF}" type="slidenum">
+            <a:fld id="{FC08C114-D934-4BB6-9F18-2364F1802D60}" type="slidenum">
               <a:rPr lang="en-US"/>
               <a:t>‹#›</a:t>
             </a:fld>
@@ -3511,7 +3511,7 @@
           <a:p>
             <a:r>
               <a:rPr lang="ko-KR"/>
-              <a:t>환절기 감기 막는 생활 습관</a:t>
+              <a:t>감기 막는 생활 습관</a:t>
             </a:r>
           </a:p>
         </p:txBody>
@@ -3640,7 +3640,7 @@
           <a:bodyPr/>
           <a:lstStyle/>
           <a:p>
-            <a:fld id="{8981E32F-615A-46C0-9ED5-9B294CE53151}" type="slidenum">
+            <a:fld id="{1C705BA1-5D8B-4D46-91F1-9D54B5AF8FAB}" type="slidenum">
               <a:rPr lang="en-US"/>
               <a:t>‹#›</a:t>
             </a:fld>
@@ -3806,7 +3806,7 @@
           <a:bodyPr/>
           <a:lstStyle/>
           <a:p>
-            <a:fld id="{6AD443B8-3596-4A63-845F-FA6B981C8B4F}" type="slidenum">
+            <a:fld id="{A2902C7C-B833-43EE-9CB3-AF6B47C402D0}" type="slidenum">
               <a:rPr lang="en-US"/>
               <a:t>‹#›</a:t>
             </a:fld>
@@ -3972,7 +3972,7 @@
           <a:bodyPr/>
           <a:lstStyle/>
           <a:p>
-            <a:fld id="{B994E478-67E3-4FC3-A0AB-885F7DCD7F4C}" type="slidenum">
+            <a:fld id="{296D99E1-4259-49E8-B063-F075C7F8F9B5}" type="slidenum">
               <a:rPr lang="en-US"/>
               <a:t>‹#›</a:t>
             </a:fld>
@@ -4138,7 +4138,7 @@
           <a:bodyPr/>
           <a:lstStyle/>
           <a:p>
-            <a:fld id="{E7826B70-048F-4C51-84AD-312B0C000169}" type="slidenum">
+            <a:fld id="{2D00DC92-86EE-4C0E-A9CE-9EE9DFBEA34C}" type="slidenum">
               <a:rPr lang="en-US"/>
               <a:t>‹#›</a:t>
             </a:fld>
@@ -4304,7 +4304,7 @@
           <a:bodyPr/>
           <a:lstStyle/>
           <a:p>
-            <a:fld id="{0D746214-1634-46C6-A35C-6BD89BB21C46}" type="slidenum">
+            <a:fld id="{319414AE-7BFD-4E17-A4A4-1E542D85D776}" type="slidenum">
               <a:rPr lang="en-US"/>
               <a:t>‹#›</a:t>
             </a:fld>
